--- a/nxtwave-challenge/growth-plan/NxtWave_Growth_Plan.pptx
+++ b/nxtwave-challenge/growth-plan/NxtWave_Growth_Plan.pptx
@@ -3354,7 +3354,7 @@
                   <a:srgbClr val="7DA1E8"/>
                 </a:solidFill>
               </a:rPr>
-              <a:t>Growth Plan by Sathwik Reddy | B.Tech CSE 2027 | Round 1 Submission</a:t>
+              <a:t>Growth Plan by Chava Sathwik | 4th Year Engineering Student | Round 1 Submission</a:t>
             </a:r>
           </a:p>
         </p:txBody>
